--- a/curso/pptx/S60.pptx
+++ b/curso/pptx/S60.pptx
@@ -7470,7 +7470,7 @@
                 </a:solidFill>
                 <a:latin typeface="Nunito Sans"/>
               </a:rPr>
-              <a:t>Crédulo: se lo cree todo</a:t>
+              <a:t>轻信的人：什么都信</a:t>
             </a:r>
           </a:p>
           <a:p>
@@ -7495,7 +7495,7 @@
                 </a:solidFill>
                 <a:latin typeface="Nunito Sans"/>
               </a:rPr>
-              <a:t>Desconfiado: no se cree nada, ni a los expertos</a:t>
+              <a:t>多疑的人：什么都不信，连专家也不信</a:t>
             </a:r>
           </a:p>
           <a:p>
@@ -7520,7 +7520,7 @@
                 </a:solidFill>
                 <a:latin typeface="Nunito Sans"/>
               </a:rPr>
-              <a:t>Veleta: cambia con el último que habla</a:t>
+              <a:t>风向标：跟着最后一个说话的人变</a:t>
             </a:r>
           </a:p>
         </p:txBody>
@@ -7650,7 +7650,7 @@
                 </a:solidFill>
                 <a:latin typeface="Nunito Sans"/>
               </a:rPr>
-              <a:t>Pide y da razones</a:t>
+              <a:t>要求并给出理由</a:t>
             </a:r>
           </a:p>
           <a:p>
@@ -7675,7 +7675,7 @@
                 </a:solidFill>
                 <a:latin typeface="Nunito Sans"/>
               </a:rPr>
-              <a:t>Comprueba antes de creer</a:t>
+              <a:t>先核实再相信</a:t>
             </a:r>
           </a:p>
           <a:p>
@@ -7700,7 +7700,7 @@
                 </a:solidFill>
                 <a:latin typeface="Nunito Sans"/>
               </a:rPr>
-              <a:t>Cambia de opinión por buenas razones</a:t>
+              <a:t>因好的理由而改变主意</a:t>
             </a:r>
           </a:p>
           <a:p>
@@ -7725,7 +7725,7 @@
                 </a:solidFill>
                 <a:latin typeface="Nunito Sans"/>
               </a:rPr>
-              <a:t>Entiende antes de criticar</a:t>
+              <a:t>先理解再批评</a:t>
             </a:r>
           </a:p>
         </p:txBody>
